--- a/db_benchmark.pptx
+++ b/db_benchmark.pptx
@@ -8359,7 +8359,7 @@
                 <a:ea typeface="Courier New" pitchFamily="34" charset="-122"/>
                 <a:cs typeface="Courier New" pitchFamily="34" charset="-120"/>
               </a:rPr>
-              <a:t>  --store=node1-data \</a:t>
+              <a:t xml:space="preserve">  --store=node1-data \</a:t>
             </a:r>
             <a:endParaRPr lang="en-US" sz="1000" dirty="0"/>
           </a:p>
@@ -8376,7 +8376,7 @@
                 <a:ea typeface="Courier New" pitchFamily="34" charset="-122"/>
                 <a:cs typeface="Courier New" pitchFamily="34" charset="-120"/>
               </a:rPr>
-              <a:t>  --listen-addr=10.0.0.11:26257 \</a:t>
+              <a:t xml:space="preserve">  --listen-addr=10.0.0.11:26257 \</a:t>
             </a:r>
             <a:endParaRPr lang="en-US" sz="1000" dirty="0"/>
           </a:p>
@@ -8393,7 +8393,7 @@
                 <a:ea typeface="Courier New" pitchFamily="34" charset="-122"/>
                 <a:cs typeface="Courier New" pitchFamily="34" charset="-120"/>
               </a:rPr>
-              <a:t>  --http-addr=10.0.0.11:8080 \</a:t>
+              <a:t xml:space="preserve">  --http-addr=10.0.0.11:8080 \</a:t>
             </a:r>
             <a:endParaRPr lang="en-US" sz="1000" dirty="0"/>
           </a:p>
@@ -8410,7 +8410,7 @@
                 <a:ea typeface="Courier New" pitchFamily="34" charset="-122"/>
                 <a:cs typeface="Courier New" pitchFamily="34" charset="-120"/>
               </a:rPr>
-              <a:t>  --join=10.0.0.11:26257,10.0.0.12:26257,10.0.0.13:26257 \</a:t>
+              <a:t xml:space="preserve">  --join=10.0.0.11:26257,10.0.0.12:26257,10.0.0.13:26257 \</a:t>
             </a:r>
             <a:endParaRPr lang="en-US" sz="1000" dirty="0"/>
           </a:p>
@@ -8427,7 +8427,7 @@
                 <a:ea typeface="Courier New" pitchFamily="34" charset="-122"/>
                 <a:cs typeface="Courier New" pitchFamily="34" charset="-120"/>
               </a:rPr>
-              <a:t>  --cache=1GB --max-sql-memory=1GB --background</a:t>
+              <a:t xml:space="preserve">  --cache=1GB --max-sql-memory=1GB --background</a:t>
             </a:r>
             <a:endParaRPr lang="en-US" sz="1000" dirty="0"/>
           </a:p>
@@ -9148,7 +9148,7 @@
                 <a:ea typeface="Courier New" pitchFamily="34" charset="-122"/>
                 <a:cs typeface="Courier New" pitchFamily="34" charset="-120"/>
               </a:rPr>
-              <a:t>  --advertise_address=10.0.0.11 \</a:t>
+              <a:t xml:space="preserve">  --advertise_address=10.0.0.11 \</a:t>
             </a:r>
             <a:endParaRPr lang="en-US" sz="1000" dirty="0"/>
           </a:p>
@@ -9165,7 +9165,7 @@
                 <a:ea typeface="Courier New" pitchFamily="34" charset="-122"/>
                 <a:cs typeface="Courier New" pitchFamily="34" charset="-120"/>
               </a:rPr>
-              <a:t>  --cloud_location=aws.us-east-1.us-east-1a</a:t>
+              <a:t xml:space="preserve">  --cloud_location=aws.us-east-1.us-east-1a</a:t>
             </a:r>
             <a:endParaRPr lang="en-US" sz="1000" dirty="0"/>
           </a:p>
@@ -9368,7 +9368,7 @@
                 <a:ea typeface="Courier New" pitchFamily="34" charset="-122"/>
                 <a:cs typeface="Courier New" pitchFamily="34" charset="-120"/>
               </a:rPr>
-              <a:t>  --join=10.0.0.11 --cloud_location=aws.us-east-1.us-east-1b</a:t>
+              <a:t xml:space="preserve">  --join=10.0.0.11 --cloud_location=aws.us-east-1.us-east-1b</a:t>
             </a:r>
             <a:endParaRPr lang="en-US" sz="1000" dirty="0"/>
           </a:p>
@@ -9402,7 +9402,7 @@
                 <a:ea typeface="Courier New" pitchFamily="34" charset="-122"/>
                 <a:cs typeface="Courier New" pitchFamily="34" charset="-120"/>
               </a:rPr>
-              <a:t>  --join=10.0.0.11 --cloud_location=aws.us-east-1.us-east-1c</a:t>
+              <a:t xml:space="preserve">  --join=10.0.0.11 --cloud_location=aws.us-east-1.us-east-1c</a:t>
             </a:r>
             <a:endParaRPr lang="en-US" sz="1000" dirty="0"/>
           </a:p>
@@ -11182,7 +11182,7 @@
         </p:nvSpPr>
         <p:spPr>
           <a:xfrm>
-            <a:off x="3072384" y="749808"/>
+            <a:off x="3022854" y="749808"/>
             <a:ext cx="0" cy="3703320"/>
           </a:xfrm>
           <a:prstGeom prst="line">
@@ -11205,7 +11205,7 @@
         </p:nvSpPr>
         <p:spPr>
           <a:xfrm>
-            <a:off x="3090672" y="777240"/>
+            <a:off x="3041142" y="777240"/>
             <a:ext cx="822960" cy="594360"/>
           </a:xfrm>
           <a:prstGeom prst="rect">
@@ -11269,7 +11269,7 @@
         </p:nvSpPr>
         <p:spPr>
           <a:xfrm>
-            <a:off x="5166360" y="749808"/>
+            <a:off x="4860036" y="749808"/>
             <a:ext cx="0" cy="3703320"/>
           </a:xfrm>
           <a:prstGeom prst="line">
@@ -11292,7 +11292,7 @@
         </p:nvSpPr>
         <p:spPr>
           <a:xfrm>
-            <a:off x="5184648" y="777240"/>
+            <a:off x="4878324" y="777240"/>
             <a:ext cx="777240" cy="594360"/>
           </a:xfrm>
           <a:prstGeom prst="rect">
@@ -11501,7 +11501,7 @@
         </p:nvSpPr>
         <p:spPr>
           <a:xfrm>
-            <a:off x="3072384" y="749808"/>
+            <a:off x="3022854" y="749808"/>
             <a:ext cx="0" cy="3703320"/>
           </a:xfrm>
           <a:prstGeom prst="line">
@@ -11524,7 +11524,7 @@
         </p:nvSpPr>
         <p:spPr>
           <a:xfrm>
-            <a:off x="3090672" y="777240"/>
+            <a:off x="3041142" y="777240"/>
             <a:ext cx="822960" cy="594360"/>
           </a:xfrm>
           <a:prstGeom prst="rect">
@@ -11588,7 +11588,7 @@
         </p:nvSpPr>
         <p:spPr>
           <a:xfrm>
-            <a:off x="5166360" y="749808"/>
+            <a:off x="4860036" y="749808"/>
             <a:ext cx="0" cy="3703320"/>
           </a:xfrm>
           <a:prstGeom prst="line">
@@ -11611,7 +11611,7 @@
         </p:nvSpPr>
         <p:spPr>
           <a:xfrm>
-            <a:off x="5184648" y="3474720"/>
+            <a:off x="4878324" y="3474720"/>
             <a:ext cx="777240" cy="594360"/>
           </a:xfrm>
           <a:prstGeom prst="rect">
@@ -11820,7 +11820,7 @@
         </p:nvSpPr>
         <p:spPr>
           <a:xfrm>
-            <a:off x="3072384" y="749808"/>
+            <a:off x="3022854" y="749808"/>
             <a:ext cx="0" cy="3703320"/>
           </a:xfrm>
           <a:prstGeom prst="line">
@@ -11843,7 +11843,7 @@
         </p:nvSpPr>
         <p:spPr>
           <a:xfrm>
-            <a:off x="2286000" y="1097280"/>
+            <a:off x="2236470" y="1097280"/>
             <a:ext cx="731520" cy="457200"/>
           </a:xfrm>
           <a:prstGeom prst="rect">
@@ -11893,7 +11893,7 @@
         </p:nvSpPr>
         <p:spPr>
           <a:xfrm>
-            <a:off x="5166360" y="749808"/>
+            <a:off x="4860036" y="749808"/>
             <a:ext cx="0" cy="3703320"/>
           </a:xfrm>
           <a:prstGeom prst="line">
@@ -11916,7 +11916,7 @@
         </p:nvSpPr>
         <p:spPr>
           <a:xfrm>
-            <a:off x="5184648" y="1097280"/>
+            <a:off x="4878324" y="1097280"/>
             <a:ext cx="685800" cy="457200"/>
           </a:xfrm>
           <a:prstGeom prst="rect">
